--- a/pres/db-pres.pptx
+++ b/pres/db-pres.pptx
@@ -7848,42 +7848,6 @@
           </a:p>
         </p:txBody>
       </p:sp>
-      <p:pic>
-        <p:nvPicPr>
-          <p:cNvPr id="7" name="Рисунок 6">
-            <a:extLst>
-              <a:ext uri="{FF2B5EF4-FFF2-40B4-BE49-F238E27FC236}">
-                <a16:creationId xmlns:a16="http://schemas.microsoft.com/office/drawing/2014/main" id="{70354F99-880B-520C-F905-22D3C60D2B54}"/>
-              </a:ext>
-            </a:extLst>
-          </p:cNvPr>
-          <p:cNvPicPr>
-            <a:picLocks noChangeAspect="1"/>
-          </p:cNvPicPr>
-          <p:nvPr/>
-        </p:nvPicPr>
-        <p:blipFill>
-          <a:blip>
-            <a:extLst>
-              <a:ext uri="{96DAC541-7B7A-43D3-8B79-37D633B846F1}">
-                <asvg:svgBlip xmlns:asvg="http://schemas.microsoft.com/office/drawing/2016/SVG/main" r:embed="rId2"/>
-              </a:ext>
-            </a:extLst>
-          </a:blip>
-          <a:stretch>
-            <a:fillRect/>
-          </a:stretch>
-        </p:blipFill>
-        <p:spPr>
-          <a:xfrm>
-            <a:off x="1090612" y="1032553"/>
-            <a:ext cx="10010775" cy="5343525"/>
-          </a:xfrm>
-          <a:prstGeom prst="rect">
-            <a:avLst/>
-          </a:prstGeom>
-        </p:spPr>
-      </p:pic>
       <p:sp>
         <p:nvSpPr>
           <p:cNvPr id="8" name="Номер слайда 7">
@@ -7913,6 +7877,42 @@
           </a:p>
         </p:txBody>
       </p:sp>
+      <p:pic>
+        <p:nvPicPr>
+          <p:cNvPr id="4" name="Рисунок 3">
+            <a:extLst>
+              <a:ext uri="{FF2B5EF4-FFF2-40B4-BE49-F238E27FC236}">
+                <a16:creationId xmlns:a16="http://schemas.microsoft.com/office/drawing/2014/main" id="{0CADE6B6-A55C-1371-59D3-0D7779C3C670}"/>
+              </a:ext>
+            </a:extLst>
+          </p:cNvPr>
+          <p:cNvPicPr>
+            <a:picLocks noChangeAspect="1"/>
+          </p:cNvPicPr>
+          <p:nvPr/>
+        </p:nvPicPr>
+        <p:blipFill>
+          <a:blip>
+            <a:extLst>
+              <a:ext uri="{96DAC541-7B7A-43D3-8B79-37D633B846F1}">
+                <asvg:svgBlip xmlns:asvg="http://schemas.microsoft.com/office/drawing/2016/SVG/main" r:embed="rId2"/>
+              </a:ext>
+            </a:extLst>
+          </a:blip>
+          <a:stretch>
+            <a:fillRect/>
+          </a:stretch>
+        </p:blipFill>
+        <p:spPr>
+          <a:xfrm>
+            <a:off x="1273246" y="1032553"/>
+            <a:ext cx="9645507" cy="5611265"/>
+          </a:xfrm>
+          <a:prstGeom prst="rect">
+            <a:avLst/>
+          </a:prstGeom>
+        </p:spPr>
+      </p:pic>
     </p:spTree>
     <p:extLst>
       <p:ext uri="{BB962C8B-B14F-4D97-AF65-F5344CB8AC3E}">
